--- a/system-design-101/vi/lessons/sd-01-033/slides/sd-01-033.pptx
+++ b/system-design-101/vi/lessons/sd-01-033/slides/sd-01-033.pptx
@@ -1778,8 +1778,17 @@
               </a:rPr>
               <a:t> tiếp:</a:t>
             </a:r>
-            <a:r>
-              <a:rPr lang="en-US" sz="8100" dirty="0" spc="-4" kern="0">
+            <a:endParaRPr lang="en-US" sz="8100" dirty="0"/>
+          </a:p>
+          <a:p>
+            <a:pPr algn="l" indent="0" marL="0">
+              <a:lnSpc>
+                <a:spcPts val="8262"/>
+              </a:lnSpc>
+              <a:buNone/>
+            </a:pPr>
+            <a:r>
+              <a:rPr lang="en-US" sz="8100" dirty="0" spc="-3" kern="0">
                 <a:solidFill>
                   <a:srgbClr val="F3EEE3"/>
                 </a:solidFill>
@@ -1787,7 +1796,7 @@
                 <a:ea typeface="Bricolage Grotesque ExtraBold" pitchFamily="34" charset="-122"/>
                 <a:cs typeface="Bricolage Grotesque ExtraBold" pitchFamily="34" charset="-120"/>
               </a:rPr>
-              <a:t> bắt</a:t>
+              <a:t>bắt</a:t>
             </a:r>
             <a:r>
               <a:rPr lang="en-US" sz="8100" dirty="0" spc="10" kern="0">
@@ -1809,7 +1818,7 @@
                 <a:ea typeface="Bricolage Grotesque ExtraBold" pitchFamily="34" charset="-122"/>
                 <a:cs typeface="Bricolage Grotesque ExtraBold" pitchFamily="34" charset="-120"/>
               </a:rPr>
-              <a:t> từ</a:t>
+              <a:t> từ nhu</a:t>
             </a:r>
             <a:r>
               <a:rPr lang="en-US" sz="8100" dirty="0" spc="-1" kern="0">
@@ -1820,7 +1829,7 @@
                 <a:ea typeface="Bricolage Grotesque ExtraBold" pitchFamily="34" charset="-122"/>
                 <a:cs typeface="Bricolage Grotesque ExtraBold" pitchFamily="34" charset="-120"/>
               </a:rPr>
-              <a:t> nhu cầu</a:t>
+              <a:t> cầu</a:t>
             </a:r>
             <a:endParaRPr lang="en-US" sz="8100" dirty="0"/>
           </a:p>

--- a/system-design-101/vi/lessons/sd-01-033/slides/sd-01-033.pptx
+++ b/system-design-101/vi/lessons/sd-01-033/slides/sd-01-033.pptx
@@ -9287,7 +9287,7 @@
         <p:spPr>
           <a:xfrm>
             <a:off x="914400" y="1390650"/>
-            <a:ext cx="12382500" cy="1143000"/>
+            <a:ext cx="12382500" cy="2047875"/>
           </a:xfrm>
           <a:prstGeom prst="rect">
             <a:avLst/>
@@ -9296,17 +9296,17 @@
           <a:ln/>
         </p:spPr>
         <p:txBody>
-          <a:bodyPr wrap="square" lIns="0" tIns="34581" rIns="0" bIns="-34581" rtlCol="0" anchor="t"/>
+          <a:bodyPr wrap="square" lIns="0" tIns="52578" rIns="0" bIns="-52578" rtlCol="0" anchor="t"/>
           <a:lstStyle/>
           <a:p>
             <a:pPr algn="l" indent="0" marL="0">
               <a:lnSpc>
-                <a:spcPts val="4901"/>
+                <a:spcPts val="7452"/>
               </a:lnSpc>
               <a:buNone/>
             </a:pPr>
             <a:r>
-              <a:rPr lang="en-US" sz="4538" dirty="0" spc="-8" kern="0">
+              <a:rPr lang="en-US" sz="6900" dirty="0" spc="-16" kern="0">
                 <a:solidFill>
                   <a:srgbClr val="F3EEE3"/>
                 </a:solidFill>
@@ -9317,7 +9317,7 @@
               <a:t>Danh</a:t>
             </a:r>
             <a:r>
-              <a:rPr lang="en-US" sz="4538" dirty="0" spc="-1" kern="0">
+              <a:rPr lang="en-US" sz="6900" dirty="0" spc="0" kern="0">
                 <a:solidFill>
                   <a:srgbClr val="F3EEE3"/>
                 </a:solidFill>
@@ -9328,7 +9328,7 @@
               <a:t> mục</a:t>
             </a:r>
             <a:r>
-              <a:rPr lang="en-US" sz="4538" dirty="0" spc="-47" kern="0">
+              <a:rPr lang="en-US" sz="6900" dirty="0" spc="-77" kern="0">
                 <a:solidFill>
                   <a:srgbClr val="F3EEE3"/>
                 </a:solidFill>
@@ -9339,7 +9339,7 @@
               <a:t> và</a:t>
             </a:r>
             <a:r>
-              <a:rPr lang="en-US" sz="4538" dirty="0" spc="-1" kern="0">
+              <a:rPr lang="en-US" sz="6900" dirty="0" spc="2" kern="0">
                 <a:solidFill>
                   <a:srgbClr val="F3EEE3"/>
                 </a:solidFill>
@@ -9350,7 +9350,7 @@
               <a:t> thông</a:t>
             </a:r>
             <a:r>
-              <a:rPr lang="en-US" sz="4538" dirty="0" spc="-3" kern="0">
+              <a:rPr lang="en-US" sz="6900" dirty="0" spc="-5" kern="0">
                 <a:solidFill>
                   <a:srgbClr val="F3EEE3"/>
                 </a:solidFill>
@@ -9361,7 +9361,7 @@
               <a:t> báo</a:t>
             </a:r>
             <a:r>
-              <a:rPr lang="en-US" sz="4538" dirty="0" spc="-17" kern="0">
+              <a:rPr lang="en-US" sz="6900" dirty="0" spc="-24" kern="0">
                 <a:solidFill>
                   <a:srgbClr val="F3EEE3"/>
                 </a:solidFill>
@@ -9372,7 +9372,7 @@
               <a:t> đơn:</a:t>
             </a:r>
             <a:r>
-              <a:rPr lang="en-US" sz="4538" dirty="0" spc="-3" kern="0">
+              <a:rPr lang="en-US" sz="6900" dirty="0" spc="-4" kern="0">
                 <a:solidFill>
                   <a:srgbClr val="F3EEE3"/>
                 </a:solidFill>
@@ -9383,7 +9383,7 @@
               <a:t> bắt</a:t>
             </a:r>
             <a:r>
-              <a:rPr lang="en-US" sz="4538" dirty="0" spc="3" kern="0">
+              <a:rPr lang="en-US" sz="6900" dirty="0" spc="7" kern="0">
                 <a:solidFill>
                   <a:srgbClr val="F3EEE3"/>
                 </a:solidFill>
@@ -9394,7 +9394,7 @@
               <a:t> buộc</a:t>
             </a:r>
             <a:r>
-              <a:rPr lang="en-US" sz="4538" dirty="0" spc="-8" kern="0">
+              <a:rPr lang="en-US" sz="6900" dirty="0" spc="-11" kern="0">
                 <a:solidFill>
                   <a:srgbClr val="F3EEE3"/>
                 </a:solidFill>
@@ -9405,7 +9405,7 @@
               <a:t> một</a:t>
             </a:r>
             <a:r>
-              <a:rPr lang="en-US" sz="4538" dirty="0" spc="-13" kern="0">
+              <a:rPr lang="en-US" sz="6900" dirty="0" spc="-19" kern="0">
                 <a:solidFill>
                   <a:srgbClr val="F3EEE3"/>
                 </a:solidFill>
@@ -9415,7 +9415,7 @@
               </a:rPr>
               <a:t> cách?</a:t>
             </a:r>
-            <a:endParaRPr lang="en-US" sz="4538" dirty="0"/>
+            <a:endParaRPr lang="en-US" sz="6900" dirty="0"/>
           </a:p>
         </p:txBody>
       </p:sp>
@@ -9470,7 +9470,7 @@
         </p:nvSpPr>
         <p:spPr>
           <a:xfrm>
-            <a:off x="914400" y="4095750"/>
+            <a:off x="914400" y="4572000"/>
             <a:ext cx="4381500" cy="1905000"/>
           </a:xfrm>
           <a:prstGeom prst="roundRect">
@@ -9551,7 +9551,7 @@
         </p:nvSpPr>
         <p:spPr>
           <a:xfrm>
-            <a:off x="7620000" y="3143250"/>
+            <a:off x="7620000" y="3619500"/>
             <a:ext cx="9753600" cy="1428750"/>
           </a:xfrm>
           <a:prstGeom prst="roundRect">
@@ -9573,7 +9573,7 @@
         </p:nvSpPr>
         <p:spPr>
           <a:xfrm>
-            <a:off x="8001000" y="3333750"/>
+            <a:off x="8001000" y="3810000"/>
             <a:ext cx="8953500" cy="381000"/>
           </a:xfrm>
           <a:prstGeom prst="rect">
@@ -9667,7 +9667,7 @@
         </p:nvSpPr>
         <p:spPr>
           <a:xfrm>
-            <a:off x="8001000" y="3810000"/>
+            <a:off x="8001000" y="4286250"/>
             <a:ext cx="8953500" cy="533400"/>
           </a:xfrm>
           <a:prstGeom prst="rect">
@@ -9750,7 +9750,7 @@
         </p:nvSpPr>
         <p:spPr>
           <a:xfrm>
-            <a:off x="7620000" y="5524500"/>
+            <a:off x="7620000" y="6000750"/>
             <a:ext cx="9753600" cy="1428750"/>
           </a:xfrm>
           <a:prstGeom prst="roundRect">
@@ -9777,7 +9777,7 @@
         </p:nvSpPr>
         <p:spPr>
           <a:xfrm>
-            <a:off x="8001000" y="5715000"/>
+            <a:off x="8001000" y="6191250"/>
             <a:ext cx="8953500" cy="381000"/>
           </a:xfrm>
           <a:prstGeom prst="rect">
@@ -9849,7 +9849,7 @@
         </p:nvSpPr>
         <p:spPr>
           <a:xfrm>
-            <a:off x="8001000" y="6191250"/>
+            <a:off x="8001000" y="6667500"/>
             <a:ext cx="8953500" cy="533400"/>
           </a:xfrm>
           <a:prstGeom prst="rect">
@@ -9943,7 +9943,7 @@
         </p:nvSpPr>
         <p:spPr>
           <a:xfrm flipV="1">
-            <a:off x="5295900" y="3857625"/>
+            <a:off x="5295900" y="4333875"/>
             <a:ext cx="2324100" cy="1190625"/>
           </a:xfrm>
           <a:prstGeom prst="curvedConnector3">
@@ -9968,7 +9968,7 @@
         </p:nvSpPr>
         <p:spPr>
           <a:xfrm>
-            <a:off x="5295900" y="5048250"/>
+            <a:off x="5295900" y="5524500"/>
             <a:ext cx="2324100" cy="1190625"/>
           </a:xfrm>
           <a:prstGeom prst="curvedConnector3">
@@ -9993,7 +9993,7 @@
         </p:nvSpPr>
         <p:spPr>
           <a:xfrm>
-            <a:off x="914400" y="7620000"/>
+            <a:off x="914400" y="8096250"/>
             <a:ext cx="16459200" cy="476250"/>
           </a:xfrm>
           <a:prstGeom prst="rect">
@@ -10120,7 +10120,7 @@
         </p:nvSpPr>
         <p:spPr>
           <a:xfrm>
-            <a:off x="914400" y="8191500"/>
+            <a:off x="914400" y="8667750"/>
             <a:ext cx="16459200" cy="476250"/>
           </a:xfrm>
           <a:prstGeom prst="rect">
